--- a/agent-observability-course/10-graphics/slides/section-07.pptx
+++ b/agent-observability-course/10-graphics/slides/section-07.pptx
@@ -758,7 +758,7 @@
           <a:lstStyle/>
           <a:p>
             <a:r>
-              <a:t>Timeouts. Atlas has one, `ATLAS_REQUEST_TIMEOUT_S`, twenty seconds by default, passed to the OpenAI client and the Router on every call. Is twenty right? Look at the worksheet. A normal call starts in two thirds of a second at p95 and finishes in under three. So twenty seconds is seven times the slowest normal call. With two retries, a stalled provider can make one user wait a minute before they see an error. Something near twice the slowest normal call, around six seconds, cuts off a stall without cutting off a long answer. One caution: offline, the mock never times out, so this knob only shows its effect against a real provider. Lab 4 and `.env.chaos.example` spell that out.</a:t>
+              <a:t>Timeouts. Atlas has one, `ATLAS_REQUEST_TIMEOUT_S`, twenty seconds by default, passed to the OpenAI client and the Router on every call. Is twenty right? Look at the worksheet. A normal call starts in two thirds of a second at p95 and finishes in under three. So twenty seconds is seven times the slowest normal call. With two retries, a stalled provider can make one user wait a minute before they see an error. Something near twice the slowest normal call, around six seconds, cuts off a stall without cutting off a long answer. And the offline mock respects it: a simulated call that would run past the deadline raises a timeout instead of completing, so you'll watch this knob work in the replay in 7.6 and in Lab 4.</a:t>
             </a:r>
           </a:p>
           <a:p/>
@@ -946,7 +946,7 @@
           <a:lstStyle/>
           <a:p>
             <a:r>
-              <a:t>With the shipped bound of two, the storm costs a dollar seventy-two extra, a thousand failed attempts billed for their input, and every request still resolves. Tighten it to one retry, and the day gets cheaper, fifty dollars thirteen. Cheaper because three hundred ninety-seven people got an error instead of an answer, and their requests stopped spending. That's not a saving. The right bound comes from the failure shape: here the provider fails exactly twice, so two is the smallest bound that works. Retries are a trade between cost and outcomes, and you only see the trade when both are on the same table.</a:t>
+              <a:t>With the shipped bound of two, the storm costs a dollar seventy-two extra, a thousand failed attempts billed for their input, and every request still resolves. Tighten it to one retry, and the day gets cheaper, fifty-four fifty-nine. Cheaper because three hundred ninety-two people got an error instead of an answer, and their requests stopped spending. That's not a saving. And look at the new line in the cost table: once three requests in a row had failed, the breaker from 7.4 opened and nearly eight hundred calls went to gpt-4o-mini, which is why the number isn't even worse. The right bound comes from the failure shape: here the provider fails exactly twice, so two is the smallest bound that works. Retries are a trade between cost and outcomes, and you only see the trade when both are on the same table.</a:t>
             </a:r>
           </a:p>
         </p:txBody>
@@ -1310,13 +1310,13 @@
           <a:p/>
           <a:p>
             <a:r>
-              <a:t>[DEMO: `3 passed, 21 deselected`: `test_retry_storm_is_billed`, `test_circuit_breaker_states`, `test_fallback_after_circuit_opens`]</a:t>
+              <a:t>[DEMO: `5 passed, 21 deselected`: `test_retry_storm_is_billed`, `test_circuit_breaker_states`, `test_fallback_after_circuit_opens`, `test...]</a:t>
             </a:r>
           </a:p>
           <a:p/>
           <a:p>
             <a:r>
-              <a:t>Three unit tests pin this offline: failed attempts are billed with their error type, the breaker moves through closed, open and half-open on a fake clock, and once it's open the next call goes to `FALLBACKS[model]`.</a:t>
+              <a:t>Five unit tests pin this offline: failed attempts are billed with their error type, the breaker moves through closed, open and half-open on a fake clock, once it's open the next call goes to `FALLBACKS[model]`, a slow call that hits the timeout trips the breaker and falls back, and the breaker reads its threshold and cooldown from `ATLAS_ROUTER_ALLOWED_FAILS` and `ATLAS_ROUTER_COOLDOWN_S`.</a:t>
             </a:r>
           </a:p>
         </p:txBody>
@@ -2124,19 +2124,42 @@
           <a:lstStyle/>
           <a:p>
             <a:r>
-              <a:t>The fix that buys seconds has two halves. First, a timeout tight enough to turn a stalled call into an error: around twice the slowest normal call, not twenty seconds. Second, somewhere else to send the step once the breaker opens, and it has to be somewhere the slowness isn't: another model family, or better, another provider. Here's the honest part. In this replay the whole provider is slow, every model, and the offline mock never times out a call. So the replay can't show the second half. You saw it work in 7.4, with the stalling provider: three timeouts, breaker open, every following request answered by the fallback. Against a real provider, `.env.chaos.example` has the settings, and the lab walks you through them.</a:t>
+              <a:t>The fix that buys seconds has two halves. First, a timeout tight enough to turn a stalled call into an error: around twice the slowest normal call, not twenty seconds. Second, somewhere else to send the step once the breaker opens, and it has to be somewhere the slowness isn't: another model family, or better, another provider. In Atlas the first fallback for gpt-4.1-mini is gpt-4o-mini, a different family, and in this scenario only the gpt-4.1 family is slow. So let's run the same afternoon with the reference settings from `.env.chaos.example`: a four-second timeout, two retries, a breaker that opens after two failures and stays open for half an hour.</a:t>
             </a:r>
           </a:p>
           <a:p/>
           <a:p>
             <a:r>
-              <a:t>[SCREEN: terminal, `uv run pytest tests/unit/test_agent.py -q -k "slow_provider or fallback"`: `2 passed`]</a:t>
+              <a:t>[SCREEN: terminal, then the Latency and Cost pages for the new store]</a:t>
             </a:r>
           </a:p>
           <a:p/>
           <a:p>
             <a:r>
-              <a:t>Two tests pin the mechanism offline: the slow-provider scenario really makes a request slower, and once the breaker is open the next call goes to the fallback.</a:t>
+              <a:t>[DEMO: the summary ends `Total cost $43.2886 p95 latency 3859 ms` with `Outcomes: escalated=47, guardrail=71, resolved=9996`, no errors...]</a:t>
+            </a:r>
+          </a:p>
+          <a:p/>
+          <a:p>
+            <a:r>
+              <a:t>Three thousand eight hundred fifty-nine milliseconds for the day. Under budget, through a four-hour provider slowdown, with zero errors. Read how it happened. At one o'clock the first slow call hit the four-second deadline, then a second one, and two in a row opened the breaker. From then on every call that would have gone to the slow deployment went to gpt-4o-mini instead: seven thousand three hundred of them, a new line in the cost table at seven dollars seventy-three. The thirty-nine timeouts on the Reliability page are the probes: every thirty minutes the breaker half-opens, tries the slow deployment once, the probe times out, and the circuit opens again. Each probe is one slow, billed request, which is the price of a cooldown and the reason the lab asks you to think about its length.</a:t>
+            </a:r>
+          </a:p>
+          <a:p>
+            <a:r>
+              <a:t>The day costs forty-three dollars instead of fifty-six, because the fallback is cheaper per token; on another day it would be dearer, and the cost table is how you'd know. That's the whole mechanism from 7.3 and 7.4, working on real traffic shapes, and nobody was paged for it.</a:t>
+            </a:r>
+          </a:p>
+          <a:p/>
+          <a:p>
+            <a:r>
+              <a:t>[SCREEN: terminal, `uv run pytest tests/unit/test_agent.py -q -k "slow_provider or fallback"`: `3 passed`]</a:t>
+            </a:r>
+          </a:p>
+          <a:p/>
+          <a:p>
+            <a:r>
+              <a:t>Three tests pin the mechanism offline: the slow-provider scenario really makes a request slower, a slow call that hits the timeout trips the breaker and falls back, and once the breaker is open the next call goes to the fallback.</a:t>
             </a:r>
           </a:p>
         </p:txBody>
@@ -2434,7 +2457,7 @@
           <a:lstStyle/>
           <a:p>
             <a:r>
-              <a:t>Two hints. First, look at the retries and fallback panels before you touch anything; if they're at zero, the fix starts with a timeout, not a fallback. Second, remember what 7.6 showed: offline, the mock slows every model and never times out a call, so the replay shows the problem and the context diet's half second, and the timeout-and-fallback half needs a real provider or the stalling provider from 7.4. The lab tells you which steps run where, and if you have keys, how to set a spending cap before you run anything against the real API.</a:t>
+              <a:t>Two hints. First, look at the retries and fallback panels before you touch anything; if they're at zero, the fix starts with a timeout, not a fallback. Second, keep `allowed_fails` at or below the retry bound: if the breaker needs more failures than one request has attempts, the breaking request ends in an error before anything falls back, and a short cooldown re-probes the slow deployment on almost every request. One retry and a two-minute cooldown fail the gate at ten seconds with fifty-eight errors. The lab has you record that run too, because knowing which settings fail is half the worksheet. If you have keys, the lab also says how to set a spending cap before you run anything against the real API.</a:t>
             </a:r>
           </a:p>
         </p:txBody>
@@ -8444,7 +8467,25 @@
                 </a:solidFill>
                 <a:latin typeface="Inter"/>
               </a:rPr>
-              <a:t>Offline the mock never times out a call; this setting matters against a real provider (verify the client's timeout semantics)</a:t>
+              <a:t>Offline the mock honours it as a whole-call deadline: a simulated call slower than the timeout raises </a:t>
+            </a:r>
+            <a:r>
+              <a:rPr sz="1656" b="0">
+                <a:solidFill>
+                  <a:srgbClr val="00D4AA"/>
+                </a:solidFill>
+                <a:latin typeface="JetBrains Mono"/>
+              </a:rPr>
+              <a:t>APITimeoutError</a:t>
+            </a:r>
+            <a:r>
+              <a:rPr sz="1800" b="0">
+                <a:solidFill>
+                  <a:srgbClr val="FFFFFF"/>
+                </a:solidFill>
+                <a:latin typeface="Inter"/>
+              </a:rPr>
+              <a:t>, so 7.6 and Lab 4 can show the effect in the replay (verify the real client's timeout semantics)</a:t>
             </a:r>
           </a:p>
         </p:txBody>
@@ -8983,7 +9024,7 @@
         </p:nvGraphicFramePr>
         <p:xfrm>
           <a:off x="457200" y="1325880"/>
-          <a:ext cx="11292838" cy="2194560"/>
+          <a:ext cx="11292839" cy="2304288"/>
         </p:xfrm>
         <a:graphic>
           <a:graphicData uri="http://schemas.openxmlformats.org/drawingml/2006/table">
@@ -8992,11 +9033,11 @@
                 <a:tableStyleId>{5C22544A-7EE6-4342-B048-85BDC9FD1C3A}</a:tableStyleId>
               </a:tblPr>
               <a:tblGrid>
-                <a:gridCol w="4327162"/>
-                <a:gridCol w="2955135"/>
-                <a:gridCol w="4010541"/>
+                <a:gridCol w="5377542"/>
+                <a:gridCol w="2509520"/>
+                <a:gridCol w="3405777"/>
               </a:tblGrid>
-              <a:tr h="438912">
+              <a:tr h="384048">
                 <a:tc>
                   <a:txBody>
                     <a:bodyPr wrap="square"/>
@@ -9015,7 +9056,7 @@
                     <a:lstStyle/>
                     <a:p>
                       <a:r>
-                        <a:rPr sz="1400" b="1">
+                        <a:rPr sz="1200" b="1">
                           <a:solidFill>
                             <a:srgbClr val="0A1628"/>
                           </a:solidFill>
@@ -9037,7 +9078,7 @@
                     <a:lstStyle/>
                     <a:p>
                       <a:r>
-                        <a:rPr sz="1400" b="1">
+                        <a:rPr sz="1200" b="1">
                           <a:solidFill>
                             <a:srgbClr val="0A1628"/>
                           </a:solidFill>
@@ -9054,14 +9095,14 @@
                   </a:tcPr>
                 </a:tc>
               </a:tr>
-              <a:tr h="438912">
+              <a:tr h="384048">
                 <a:tc>
                   <a:txBody>
                     <a:bodyPr wrap="square"/>
                     <a:lstStyle/>
                     <a:p>
                       <a:r>
-                        <a:rPr sz="1400" b="1">
+                        <a:rPr sz="1200" b="1">
                           <a:solidFill>
                             <a:srgbClr val="FFFFFF"/>
                           </a:solidFill>
@@ -9083,7 +9124,7 @@
                     <a:lstStyle/>
                     <a:p>
                       <a:r>
-                        <a:rPr sz="1400" b="0">
+                        <a:rPr sz="1200" b="0">
                           <a:solidFill>
                             <a:srgbClr val="FFFFFF"/>
                           </a:solidFill>
@@ -9105,13 +9146,13 @@
                     <a:lstStyle/>
                     <a:p>
                       <a:r>
-                        <a:rPr sz="1400" b="0">
+                        <a:rPr sz="1200" b="0">
                           <a:solidFill>
                             <a:srgbClr val="FFFFFF"/>
                           </a:solidFill>
                           <a:latin typeface="Inter"/>
                         </a:rPr>
-                        <a:t>$50.13</a:t>
+                        <a:t>$54.59</a:t>
                       </a:r>
                     </a:p>
                   </a:txBody>
@@ -9122,14 +9163,14 @@
                   </a:tcPr>
                 </a:tc>
               </a:tr>
-              <a:tr h="438912">
+              <a:tr h="384048">
                 <a:tc>
                   <a:txBody>
                     <a:bodyPr wrap="square"/>
                     <a:lstStyle/>
                     <a:p>
                       <a:r>
-                        <a:rPr sz="1400" b="1">
+                        <a:rPr sz="1200" b="1">
                           <a:solidFill>
                             <a:srgbClr val="FFFFFF"/>
                           </a:solidFill>
@@ -9151,7 +9192,7 @@
                     <a:lstStyle/>
                     <a:p>
                       <a:r>
-                        <a:rPr sz="1400" b="0">
+                        <a:rPr sz="1200" b="0">
                           <a:solidFill>
                             <a:srgbClr val="FFFFFF"/>
                           </a:solidFill>
@@ -9160,7 +9201,7 @@
                         <a:t>1,002, all </a:t>
                       </a:r>
                       <a:r>
-                        <a:rPr sz="1288" b="0">
+                        <a:rPr sz="1104" b="0">
                           <a:solidFill>
                             <a:srgbClr val="00D4AA"/>
                           </a:solidFill>
@@ -9182,13 +9223,13 @@
                     <a:lstStyle/>
                     <a:p>
                       <a:r>
-                        <a:rPr sz="1400" b="0">
+                        <a:rPr sz="1200" b="0">
                           <a:solidFill>
                             <a:srgbClr val="FFFFFF"/>
                           </a:solidFill>
                           <a:latin typeface="Inter"/>
                         </a:rPr>
-                        <a:t>806</a:t>
+                        <a:t>799</a:t>
                       </a:r>
                     </a:p>
                   </a:txBody>
@@ -9199,14 +9240,14 @@
                   </a:tcPr>
                 </a:tc>
               </a:tr>
-              <a:tr h="438912">
+              <a:tr h="384048">
                 <a:tc>
                   <a:txBody>
                     <a:bodyPr wrap="square"/>
                     <a:lstStyle/>
                     <a:p>
                       <a:r>
-                        <a:rPr sz="1400" b="1">
+                        <a:rPr sz="1200" b="1">
                           <a:solidFill>
                             <a:srgbClr val="FFFFFF"/>
                           </a:solidFill>
@@ -9215,7 +9256,7 @@
                         <a:t>Requests ending </a:t>
                       </a:r>
                       <a:r>
-                        <a:rPr sz="1288" b="0">
+                        <a:rPr sz="1104" b="0">
                           <a:solidFill>
                             <a:srgbClr val="00D4AA"/>
                           </a:solidFill>
@@ -9237,7 +9278,7 @@
                     <a:lstStyle/>
                     <a:p>
                       <a:r>
-                        <a:rPr sz="1400" b="0">
+                        <a:rPr sz="1200" b="0">
                           <a:solidFill>
                             <a:srgbClr val="FFFFFF"/>
                           </a:solidFill>
@@ -9259,13 +9300,13 @@
                     <a:lstStyle/>
                     <a:p>
                       <a:r>
-                        <a:rPr sz="1400" b="0">
+                        <a:rPr sz="1200" b="0">
                           <a:solidFill>
                             <a:srgbClr val="FFFFFF"/>
                           </a:solidFill>
                           <a:latin typeface="Inter"/>
                         </a:rPr>
-                        <a:t>397</a:t>
+                        <a:t>392</a:t>
                       </a:r>
                     </a:p>
                   </a:txBody>
@@ -9276,20 +9317,20 @@
                   </a:tcPr>
                 </a:tc>
               </a:tr>
-              <a:tr h="438912">
+              <a:tr h="384048">
                 <a:tc>
                   <a:txBody>
                     <a:bodyPr wrap="square"/>
                     <a:lstStyle/>
                     <a:p>
                       <a:r>
-                        <a:rPr sz="1400" b="1">
+                        <a:rPr sz="1200" b="1">
                           <a:solidFill>
                             <a:srgbClr val="FFFFFF"/>
                           </a:solidFill>
                           <a:latin typeface="Inter"/>
                         </a:rPr>
-                        <a:t>What users saw</a:t>
+                        <a:t>Calls served by the fallback gpt-4o-mini (report, "Cost by model")</a:t>
                       </a:r>
                     </a:p>
                   </a:txBody>
@@ -9305,13 +9346,13 @@
                     <a:lstStyle/>
                     <a:p>
                       <a:r>
-                        <a:rPr sz="1400" b="0">
+                        <a:rPr sz="1200" b="0">
                           <a:solidFill>
                             <a:srgbClr val="FFFFFF"/>
                           </a:solidFill>
                           <a:latin typeface="Inter"/>
                         </a:rPr>
-                        <a:t>every answer, a little later</a:t>
+                        <a:t>0</a:t>
                       </a:r>
                     </a:p>
                   </a:txBody>
@@ -9327,19 +9368,87 @@
                     <a:lstStyle/>
                     <a:p>
                       <a:r>
-                        <a:rPr sz="1400" b="0">
+                        <a:rPr sz="1200" b="0">
                           <a:solidFill>
                             <a:srgbClr val="FFFFFF"/>
                           </a:solidFill>
                           <a:latin typeface="Inter"/>
                         </a:rPr>
-                        <a:t>397 "Atlas is temporarily unavailable"</a:t>
+                        <a:t>795</a:t>
                       </a:r>
                     </a:p>
                   </a:txBody>
                   <a:tcPr marL="91440" marR="91440" marT="45720" marB="45720" anchor="ctr">
                     <a:solidFill>
                       <a:srgbClr val="0F1E35"/>
+                    </a:solidFill>
+                  </a:tcPr>
+                </a:tc>
+              </a:tr>
+              <a:tr h="384048">
+                <a:tc>
+                  <a:txBody>
+                    <a:bodyPr wrap="square"/>
+                    <a:lstStyle/>
+                    <a:p>
+                      <a:r>
+                        <a:rPr sz="1200" b="1">
+                          <a:solidFill>
+                            <a:srgbClr val="FFFFFF"/>
+                          </a:solidFill>
+                          <a:latin typeface="Inter"/>
+                        </a:rPr>
+                        <a:t>What users saw</a:t>
+                      </a:r>
+                    </a:p>
+                  </a:txBody>
+                  <a:tcPr marL="91440" marR="91440" marT="45720" marB="45720" anchor="ctr">
+                    <a:solidFill>
+                      <a:srgbClr val="1A2742"/>
+                    </a:solidFill>
+                  </a:tcPr>
+                </a:tc>
+                <a:tc>
+                  <a:txBody>
+                    <a:bodyPr wrap="square"/>
+                    <a:lstStyle/>
+                    <a:p>
+                      <a:r>
+                        <a:rPr sz="1200" b="0">
+                          <a:solidFill>
+                            <a:srgbClr val="FFFFFF"/>
+                          </a:solidFill>
+                          <a:latin typeface="Inter"/>
+                        </a:rPr>
+                        <a:t>every answer, a little later</a:t>
+                      </a:r>
+                    </a:p>
+                  </a:txBody>
+                  <a:tcPr marL="91440" marR="91440" marT="45720" marB="45720" anchor="ctr">
+                    <a:solidFill>
+                      <a:srgbClr val="1A2742"/>
+                    </a:solidFill>
+                  </a:tcPr>
+                </a:tc>
+                <a:tc>
+                  <a:txBody>
+                    <a:bodyPr wrap="square"/>
+                    <a:lstStyle/>
+                    <a:p>
+                      <a:r>
+                        <a:rPr sz="1200" b="0">
+                          <a:solidFill>
+                            <a:srgbClr val="FFFFFF"/>
+                          </a:solidFill>
+                          <a:latin typeface="Inter"/>
+                        </a:rPr>
+                        <a:t>392 "Atlas is temporarily unavailable"</a:t>
+                      </a:r>
+                    </a:p>
+                  </a:txBody>
+                  <a:tcPr marL="91440" marR="91440" marT="45720" marB="45720" anchor="ctr">
+                    <a:solidFill>
+                      <a:srgbClr val="1A2742"/>
                     </a:solidFill>
                   </a:tcPr>
                 </a:tc>
@@ -16205,7 +16314,25 @@
                 </a:solidFill>
                 <a:latin typeface="Inter"/>
               </a:rPr>
-              <a:t>Offline, the mock slows every model and never times out, so this half is proven by tests, not by the replay</a:t>
+              <a:t>Offline this is measurable: the mock honours the timeout, and </a:t>
+            </a:r>
+            <a:r>
+              <a:rPr sz="1656" b="0">
+                <a:solidFill>
+                  <a:srgbClr val="00D4AA"/>
+                </a:solidFill>
+                <a:latin typeface="JetBrains Mono"/>
+              </a:rPr>
+              <a:t>slow_provider</a:t>
+            </a:r>
+            <a:r>
+              <a:rPr sz="1800" b="0">
+                <a:solidFill>
+                  <a:srgbClr val="FFFFFF"/>
+                </a:solidFill>
+                <a:latin typeface="Inter"/>
+              </a:rPr>
+              <a:t> slows only the gpt-4.1 family, so gpt-4o-mini is somewhere the slowness isn't</a:t>
             </a:r>
           </a:p>
           <a:p>
@@ -16229,7 +16356,7 @@
                 </a:solidFill>
                 <a:latin typeface="Inter"/>
               </a:rPr>
-              <a:t>Against a real provider: </a:t>
+              <a:t>The reference settings, </a:t>
             </a:r>
             <a:r>
               <a:rPr sz="1656" b="0">
@@ -16247,7 +16374,7 @@
                 </a:solidFill>
                 <a:latin typeface="Inter"/>
               </a:rPr>
-              <a:t> (</a:t>
+              <a:t>: </a:t>
             </a:r>
             <a:r>
               <a:rPr sz="1656" b="0">
@@ -16274,7 +16401,7 @@
                 </a:solidFill>
                 <a:latin typeface="JetBrains Mono"/>
               </a:rPr>
-              <a:t>ATLAS_MAX_RETRIES=1</a:t>
+              <a:t>ATLAS_MAX_RETRIES=2</a:t>
             </a:r>
             <a:r>
               <a:rPr sz="1800" b="0">
@@ -16292,7 +16419,7 @@
                 </a:solidFill>
                 <a:latin typeface="JetBrains Mono"/>
               </a:rPr>
-              <a:t>ATLAS_ROUTER_MODE=1</a:t>
+              <a:t>ATLAS_ROUTER_ALLOWED_FAILS=2</a:t>
             </a:r>
             <a:r>
               <a:rPr sz="1800" b="0">
@@ -16310,16 +16437,7 @@
                 </a:solidFill>
                 <a:latin typeface="JetBrains Mono"/>
               </a:rPr>
-              <a:t>OFFLINE=0</a:t>
-            </a:r>
-            <a:r>
-              <a:rPr sz="1800" b="0">
-                <a:solidFill>
-                  <a:srgbClr val="FFFFFF"/>
-                </a:solidFill>
-                <a:latin typeface="Inter"/>
-              </a:rPr>
-              <a:t>)</a:t>
+              <a:t>ATLAS_ROUTER_COOLDOWN_S=1800</a:t>
             </a:r>
           </a:p>
         </p:txBody>
@@ -16507,7 +16625,7 @@
                 </a:solidFill>
                 <a:latin typeface="Inter"/>
               </a:rPr>
-              <a:t>The fallback list: right already, it just needs an error to fire</a:t>
+              <a:t>The fallback list: right already, it just needed the timeout to turn slowness into an error</a:t>
             </a:r>
           </a:p>
           <a:p>
